--- a/tools/myCustomBlockly/block.pptx
+++ b/tools/myCustomBlockly/block.pptx
@@ -13970,6 +13970,606 @@
           </p:sp>
         </p:grpSp>
       </p:grpSp>
+      <p:grpSp>
+        <p:nvGrpSpPr>
+          <p:cNvPr id="6" name="群組 5"/>
+          <p:cNvGrpSpPr/>
+          <p:nvPr/>
+        </p:nvGrpSpPr>
+        <p:grpSpPr>
+          <a:xfrm>
+            <a:off x="5116576" y="5296427"/>
+            <a:ext cx="2282153" cy="263525"/>
+            <a:chOff x="5116576" y="5296427"/>
+            <a:chExt cx="2282153" cy="263525"/>
+          </a:xfrm>
+        </p:grpSpPr>
+        <p:sp>
+          <p:nvSpPr>
+            <p:cNvPr id="81" name="圓角矩形 48"/>
+            <p:cNvSpPr/>
+            <p:nvPr/>
+          </p:nvSpPr>
+          <p:spPr>
+            <a:xfrm>
+              <a:off x="5116576" y="5296427"/>
+              <a:ext cx="2282153" cy="263525"/>
+            </a:xfrm>
+            <a:custGeom>
+              <a:avLst/>
+              <a:gdLst>
+                <a:gd name="connsiteX0" fmla="*/ 0 w 4506685"/>
+                <a:gd name="connsiteY0" fmla="*/ 62594 h 375557"/>
+                <a:gd name="connsiteX1" fmla="*/ 62594 w 4506685"/>
+                <a:gd name="connsiteY1" fmla="*/ 0 h 375557"/>
+                <a:gd name="connsiteX2" fmla="*/ 4444091 w 4506685"/>
+                <a:gd name="connsiteY2" fmla="*/ 0 h 375557"/>
+                <a:gd name="connsiteX3" fmla="*/ 4506685 w 4506685"/>
+                <a:gd name="connsiteY3" fmla="*/ 62594 h 375557"/>
+                <a:gd name="connsiteX4" fmla="*/ 4506685 w 4506685"/>
+                <a:gd name="connsiteY4" fmla="*/ 312963 h 375557"/>
+                <a:gd name="connsiteX5" fmla="*/ 4444091 w 4506685"/>
+                <a:gd name="connsiteY5" fmla="*/ 375557 h 375557"/>
+                <a:gd name="connsiteX6" fmla="*/ 62594 w 4506685"/>
+                <a:gd name="connsiteY6" fmla="*/ 375557 h 375557"/>
+                <a:gd name="connsiteX7" fmla="*/ 0 w 4506685"/>
+                <a:gd name="connsiteY7" fmla="*/ 312963 h 375557"/>
+                <a:gd name="connsiteX8" fmla="*/ 0 w 4506685"/>
+                <a:gd name="connsiteY8" fmla="*/ 62594 h 375557"/>
+                <a:gd name="connsiteX0" fmla="*/ 0 w 4506685"/>
+                <a:gd name="connsiteY0" fmla="*/ 62594 h 375557"/>
+                <a:gd name="connsiteX1" fmla="*/ 62594 w 4506685"/>
+                <a:gd name="connsiteY1" fmla="*/ 0 h 375557"/>
+                <a:gd name="connsiteX2" fmla="*/ 4444091 w 4506685"/>
+                <a:gd name="connsiteY2" fmla="*/ 0 h 375557"/>
+                <a:gd name="connsiteX3" fmla="*/ 4506685 w 4506685"/>
+                <a:gd name="connsiteY3" fmla="*/ 62594 h 375557"/>
+                <a:gd name="connsiteX4" fmla="*/ 4506685 w 4506685"/>
+                <a:gd name="connsiteY4" fmla="*/ 312963 h 375557"/>
+                <a:gd name="connsiteX5" fmla="*/ 4444091 w 4506685"/>
+                <a:gd name="connsiteY5" fmla="*/ 375557 h 375557"/>
+                <a:gd name="connsiteX6" fmla="*/ 62594 w 4506685"/>
+                <a:gd name="connsiteY6" fmla="*/ 375557 h 375557"/>
+                <a:gd name="connsiteX7" fmla="*/ 0 w 4506685"/>
+                <a:gd name="connsiteY7" fmla="*/ 312963 h 375557"/>
+                <a:gd name="connsiteX8" fmla="*/ 5443 w 4506685"/>
+                <a:gd name="connsiteY8" fmla="*/ 163286 h 375557"/>
+                <a:gd name="connsiteX9" fmla="*/ 0 w 4506685"/>
+                <a:gd name="connsiteY9" fmla="*/ 62594 h 375557"/>
+                <a:gd name="connsiteX0" fmla="*/ 310249 w 4816934"/>
+                <a:gd name="connsiteY0" fmla="*/ 62594 h 375557"/>
+                <a:gd name="connsiteX1" fmla="*/ 372843 w 4816934"/>
+                <a:gd name="connsiteY1" fmla="*/ 0 h 375557"/>
+                <a:gd name="connsiteX2" fmla="*/ 4754340 w 4816934"/>
+                <a:gd name="connsiteY2" fmla="*/ 0 h 375557"/>
+                <a:gd name="connsiteX3" fmla="*/ 4816934 w 4816934"/>
+                <a:gd name="connsiteY3" fmla="*/ 62594 h 375557"/>
+                <a:gd name="connsiteX4" fmla="*/ 4816934 w 4816934"/>
+                <a:gd name="connsiteY4" fmla="*/ 312963 h 375557"/>
+                <a:gd name="connsiteX5" fmla="*/ 4754340 w 4816934"/>
+                <a:gd name="connsiteY5" fmla="*/ 375557 h 375557"/>
+                <a:gd name="connsiteX6" fmla="*/ 372843 w 4816934"/>
+                <a:gd name="connsiteY6" fmla="*/ 375557 h 375557"/>
+                <a:gd name="connsiteX7" fmla="*/ 310249 w 4816934"/>
+                <a:gd name="connsiteY7" fmla="*/ 312963 h 375557"/>
+                <a:gd name="connsiteX8" fmla="*/ 0 w 4816934"/>
+                <a:gd name="connsiteY8" fmla="*/ 146945 h 375557"/>
+                <a:gd name="connsiteX9" fmla="*/ 310249 w 4816934"/>
+                <a:gd name="connsiteY9" fmla="*/ 62594 h 375557"/>
+                <a:gd name="connsiteX0" fmla="*/ 310249 w 4816934"/>
+                <a:gd name="connsiteY0" fmla="*/ 62594 h 375557"/>
+                <a:gd name="connsiteX1" fmla="*/ 372843 w 4816934"/>
+                <a:gd name="connsiteY1" fmla="*/ 0 h 375557"/>
+                <a:gd name="connsiteX2" fmla="*/ 4754340 w 4816934"/>
+                <a:gd name="connsiteY2" fmla="*/ 0 h 375557"/>
+                <a:gd name="connsiteX3" fmla="*/ 4816934 w 4816934"/>
+                <a:gd name="connsiteY3" fmla="*/ 62594 h 375557"/>
+                <a:gd name="connsiteX4" fmla="*/ 4816934 w 4816934"/>
+                <a:gd name="connsiteY4" fmla="*/ 312963 h 375557"/>
+                <a:gd name="connsiteX5" fmla="*/ 4754340 w 4816934"/>
+                <a:gd name="connsiteY5" fmla="*/ 375557 h 375557"/>
+                <a:gd name="connsiteX6" fmla="*/ 372843 w 4816934"/>
+                <a:gd name="connsiteY6" fmla="*/ 375557 h 375557"/>
+                <a:gd name="connsiteX7" fmla="*/ 310249 w 4816934"/>
+                <a:gd name="connsiteY7" fmla="*/ 312963 h 375557"/>
+                <a:gd name="connsiteX8" fmla="*/ 190500 w 4816934"/>
+                <a:gd name="connsiteY8" fmla="*/ 261257 h 375557"/>
+                <a:gd name="connsiteX9" fmla="*/ 0 w 4816934"/>
+                <a:gd name="connsiteY9" fmla="*/ 146945 h 375557"/>
+                <a:gd name="connsiteX10" fmla="*/ 310249 w 4816934"/>
+                <a:gd name="connsiteY10" fmla="*/ 62594 h 375557"/>
+                <a:gd name="connsiteX0" fmla="*/ 321154 w 4827839"/>
+                <a:gd name="connsiteY0" fmla="*/ 62594 h 375557"/>
+                <a:gd name="connsiteX1" fmla="*/ 383748 w 4827839"/>
+                <a:gd name="connsiteY1" fmla="*/ 0 h 375557"/>
+                <a:gd name="connsiteX2" fmla="*/ 4765245 w 4827839"/>
+                <a:gd name="connsiteY2" fmla="*/ 0 h 375557"/>
+                <a:gd name="connsiteX3" fmla="*/ 4827839 w 4827839"/>
+                <a:gd name="connsiteY3" fmla="*/ 62594 h 375557"/>
+                <a:gd name="connsiteX4" fmla="*/ 4827839 w 4827839"/>
+                <a:gd name="connsiteY4" fmla="*/ 312963 h 375557"/>
+                <a:gd name="connsiteX5" fmla="*/ 4765245 w 4827839"/>
+                <a:gd name="connsiteY5" fmla="*/ 375557 h 375557"/>
+                <a:gd name="connsiteX6" fmla="*/ 383748 w 4827839"/>
+                <a:gd name="connsiteY6" fmla="*/ 375557 h 375557"/>
+                <a:gd name="connsiteX7" fmla="*/ 321154 w 4827839"/>
+                <a:gd name="connsiteY7" fmla="*/ 312963 h 375557"/>
+                <a:gd name="connsiteX8" fmla="*/ 0 w 4827839"/>
+                <a:gd name="connsiteY8" fmla="*/ 321173 h 375557"/>
+                <a:gd name="connsiteX9" fmla="*/ 10905 w 4827839"/>
+                <a:gd name="connsiteY9" fmla="*/ 146945 h 375557"/>
+                <a:gd name="connsiteX10" fmla="*/ 321154 w 4827839"/>
+                <a:gd name="connsiteY10" fmla="*/ 62594 h 375557"/>
+                <a:gd name="connsiteX0" fmla="*/ 321154 w 4827839"/>
+                <a:gd name="connsiteY0" fmla="*/ 62594 h 375557"/>
+                <a:gd name="connsiteX1" fmla="*/ 383748 w 4827839"/>
+                <a:gd name="connsiteY1" fmla="*/ 0 h 375557"/>
+                <a:gd name="connsiteX2" fmla="*/ 4765245 w 4827839"/>
+                <a:gd name="connsiteY2" fmla="*/ 0 h 375557"/>
+                <a:gd name="connsiteX3" fmla="*/ 4827839 w 4827839"/>
+                <a:gd name="connsiteY3" fmla="*/ 62594 h 375557"/>
+                <a:gd name="connsiteX4" fmla="*/ 4827839 w 4827839"/>
+                <a:gd name="connsiteY4" fmla="*/ 312963 h 375557"/>
+                <a:gd name="connsiteX5" fmla="*/ 4765245 w 4827839"/>
+                <a:gd name="connsiteY5" fmla="*/ 375557 h 375557"/>
+                <a:gd name="connsiteX6" fmla="*/ 383748 w 4827839"/>
+                <a:gd name="connsiteY6" fmla="*/ 375557 h 375557"/>
+                <a:gd name="connsiteX7" fmla="*/ 321154 w 4827839"/>
+                <a:gd name="connsiteY7" fmla="*/ 312963 h 375557"/>
+                <a:gd name="connsiteX8" fmla="*/ 0 w 4827839"/>
+                <a:gd name="connsiteY8" fmla="*/ 321173 h 375557"/>
+                <a:gd name="connsiteX9" fmla="*/ 38122 w 4827839"/>
+                <a:gd name="connsiteY9" fmla="*/ 97924 h 375557"/>
+                <a:gd name="connsiteX10" fmla="*/ 321154 w 4827839"/>
+                <a:gd name="connsiteY10" fmla="*/ 62594 h 375557"/>
+                <a:gd name="connsiteX0" fmla="*/ 283032 w 4789717"/>
+                <a:gd name="connsiteY0" fmla="*/ 62594 h 375557"/>
+                <a:gd name="connsiteX1" fmla="*/ 345626 w 4789717"/>
+                <a:gd name="connsiteY1" fmla="*/ 0 h 375557"/>
+                <a:gd name="connsiteX2" fmla="*/ 4727123 w 4789717"/>
+                <a:gd name="connsiteY2" fmla="*/ 0 h 375557"/>
+                <a:gd name="connsiteX3" fmla="*/ 4789717 w 4789717"/>
+                <a:gd name="connsiteY3" fmla="*/ 62594 h 375557"/>
+                <a:gd name="connsiteX4" fmla="*/ 4789717 w 4789717"/>
+                <a:gd name="connsiteY4" fmla="*/ 312963 h 375557"/>
+                <a:gd name="connsiteX5" fmla="*/ 4727123 w 4789717"/>
+                <a:gd name="connsiteY5" fmla="*/ 375557 h 375557"/>
+                <a:gd name="connsiteX6" fmla="*/ 345626 w 4789717"/>
+                <a:gd name="connsiteY6" fmla="*/ 375557 h 375557"/>
+                <a:gd name="connsiteX7" fmla="*/ 283032 w 4789717"/>
+                <a:gd name="connsiteY7" fmla="*/ 312963 h 375557"/>
+                <a:gd name="connsiteX8" fmla="*/ 21756 w 4789717"/>
+                <a:gd name="connsiteY8" fmla="*/ 315726 h 375557"/>
+                <a:gd name="connsiteX9" fmla="*/ 0 w 4789717"/>
+                <a:gd name="connsiteY9" fmla="*/ 97924 h 375557"/>
+                <a:gd name="connsiteX10" fmla="*/ 283032 w 4789717"/>
+                <a:gd name="connsiteY10" fmla="*/ 62594 h 375557"/>
+                <a:gd name="connsiteX0" fmla="*/ 261276 w 4767961"/>
+                <a:gd name="connsiteY0" fmla="*/ 62594 h 375557"/>
+                <a:gd name="connsiteX1" fmla="*/ 323870 w 4767961"/>
+                <a:gd name="connsiteY1" fmla="*/ 0 h 375557"/>
+                <a:gd name="connsiteX2" fmla="*/ 4705367 w 4767961"/>
+                <a:gd name="connsiteY2" fmla="*/ 0 h 375557"/>
+                <a:gd name="connsiteX3" fmla="*/ 4767961 w 4767961"/>
+                <a:gd name="connsiteY3" fmla="*/ 62594 h 375557"/>
+                <a:gd name="connsiteX4" fmla="*/ 4767961 w 4767961"/>
+                <a:gd name="connsiteY4" fmla="*/ 312963 h 375557"/>
+                <a:gd name="connsiteX5" fmla="*/ 4705367 w 4767961"/>
+                <a:gd name="connsiteY5" fmla="*/ 375557 h 375557"/>
+                <a:gd name="connsiteX6" fmla="*/ 323870 w 4767961"/>
+                <a:gd name="connsiteY6" fmla="*/ 375557 h 375557"/>
+                <a:gd name="connsiteX7" fmla="*/ 261276 w 4767961"/>
+                <a:gd name="connsiteY7" fmla="*/ 312963 h 375557"/>
+                <a:gd name="connsiteX8" fmla="*/ 0 w 4767961"/>
+                <a:gd name="connsiteY8" fmla="*/ 315726 h 375557"/>
+                <a:gd name="connsiteX9" fmla="*/ 92557 w 4767961"/>
+                <a:gd name="connsiteY9" fmla="*/ 81583 h 375557"/>
+                <a:gd name="connsiteX10" fmla="*/ 261276 w 4767961"/>
+                <a:gd name="connsiteY10" fmla="*/ 62594 h 375557"/>
+                <a:gd name="connsiteX0" fmla="*/ 168719 w 4675404"/>
+                <a:gd name="connsiteY0" fmla="*/ 62594 h 375557"/>
+                <a:gd name="connsiteX1" fmla="*/ 231313 w 4675404"/>
+                <a:gd name="connsiteY1" fmla="*/ 0 h 375557"/>
+                <a:gd name="connsiteX2" fmla="*/ 4612810 w 4675404"/>
+                <a:gd name="connsiteY2" fmla="*/ 0 h 375557"/>
+                <a:gd name="connsiteX3" fmla="*/ 4675404 w 4675404"/>
+                <a:gd name="connsiteY3" fmla="*/ 62594 h 375557"/>
+                <a:gd name="connsiteX4" fmla="*/ 4675404 w 4675404"/>
+                <a:gd name="connsiteY4" fmla="*/ 312963 h 375557"/>
+                <a:gd name="connsiteX5" fmla="*/ 4612810 w 4675404"/>
+                <a:gd name="connsiteY5" fmla="*/ 375557 h 375557"/>
+                <a:gd name="connsiteX6" fmla="*/ 231313 w 4675404"/>
+                <a:gd name="connsiteY6" fmla="*/ 375557 h 375557"/>
+                <a:gd name="connsiteX7" fmla="*/ 168719 w 4675404"/>
+                <a:gd name="connsiteY7" fmla="*/ 312963 h 375557"/>
+                <a:gd name="connsiteX8" fmla="*/ 59855 w 4675404"/>
+                <a:gd name="connsiteY8" fmla="*/ 315726 h 375557"/>
+                <a:gd name="connsiteX9" fmla="*/ 0 w 4675404"/>
+                <a:gd name="connsiteY9" fmla="*/ 81583 h 375557"/>
+                <a:gd name="connsiteX10" fmla="*/ 168719 w 4675404"/>
+                <a:gd name="connsiteY10" fmla="*/ 62594 h 375557"/>
+                <a:gd name="connsiteX0" fmla="*/ 119183 w 4625868"/>
+                <a:gd name="connsiteY0" fmla="*/ 62594 h 375557"/>
+                <a:gd name="connsiteX1" fmla="*/ 181777 w 4625868"/>
+                <a:gd name="connsiteY1" fmla="*/ 0 h 375557"/>
+                <a:gd name="connsiteX2" fmla="*/ 4563274 w 4625868"/>
+                <a:gd name="connsiteY2" fmla="*/ 0 h 375557"/>
+                <a:gd name="connsiteX3" fmla="*/ 4625868 w 4625868"/>
+                <a:gd name="connsiteY3" fmla="*/ 62594 h 375557"/>
+                <a:gd name="connsiteX4" fmla="*/ 4625868 w 4625868"/>
+                <a:gd name="connsiteY4" fmla="*/ 312963 h 375557"/>
+                <a:gd name="connsiteX5" fmla="*/ 4563274 w 4625868"/>
+                <a:gd name="connsiteY5" fmla="*/ 375557 h 375557"/>
+                <a:gd name="connsiteX6" fmla="*/ 181777 w 4625868"/>
+                <a:gd name="connsiteY6" fmla="*/ 375557 h 375557"/>
+                <a:gd name="connsiteX7" fmla="*/ 119183 w 4625868"/>
+                <a:gd name="connsiteY7" fmla="*/ 312963 h 375557"/>
+                <a:gd name="connsiteX8" fmla="*/ 10319 w 4625868"/>
+                <a:gd name="connsiteY8" fmla="*/ 315726 h 375557"/>
+                <a:gd name="connsiteX9" fmla="*/ 0 w 4625868"/>
+                <a:gd name="connsiteY9" fmla="*/ 77770 h 375557"/>
+                <a:gd name="connsiteX10" fmla="*/ 119183 w 4625868"/>
+                <a:gd name="connsiteY10" fmla="*/ 62594 h 375557"/>
+                <a:gd name="connsiteX0" fmla="*/ 119183 w 4625868"/>
+                <a:gd name="connsiteY0" fmla="*/ 127411 h 375557"/>
+                <a:gd name="connsiteX1" fmla="*/ 181777 w 4625868"/>
+                <a:gd name="connsiteY1" fmla="*/ 0 h 375557"/>
+                <a:gd name="connsiteX2" fmla="*/ 4563274 w 4625868"/>
+                <a:gd name="connsiteY2" fmla="*/ 0 h 375557"/>
+                <a:gd name="connsiteX3" fmla="*/ 4625868 w 4625868"/>
+                <a:gd name="connsiteY3" fmla="*/ 62594 h 375557"/>
+                <a:gd name="connsiteX4" fmla="*/ 4625868 w 4625868"/>
+                <a:gd name="connsiteY4" fmla="*/ 312963 h 375557"/>
+                <a:gd name="connsiteX5" fmla="*/ 4563274 w 4625868"/>
+                <a:gd name="connsiteY5" fmla="*/ 375557 h 375557"/>
+                <a:gd name="connsiteX6" fmla="*/ 181777 w 4625868"/>
+                <a:gd name="connsiteY6" fmla="*/ 375557 h 375557"/>
+                <a:gd name="connsiteX7" fmla="*/ 119183 w 4625868"/>
+                <a:gd name="connsiteY7" fmla="*/ 312963 h 375557"/>
+                <a:gd name="connsiteX8" fmla="*/ 10319 w 4625868"/>
+                <a:gd name="connsiteY8" fmla="*/ 315726 h 375557"/>
+                <a:gd name="connsiteX9" fmla="*/ 0 w 4625868"/>
+                <a:gd name="connsiteY9" fmla="*/ 77770 h 375557"/>
+                <a:gd name="connsiteX10" fmla="*/ 119183 w 4625868"/>
+                <a:gd name="connsiteY10" fmla="*/ 127411 h 375557"/>
+                <a:gd name="connsiteX0" fmla="*/ 119183 w 4625868"/>
+                <a:gd name="connsiteY0" fmla="*/ 127411 h 375557"/>
+                <a:gd name="connsiteX1" fmla="*/ 181777 w 4625868"/>
+                <a:gd name="connsiteY1" fmla="*/ 0 h 375557"/>
+                <a:gd name="connsiteX2" fmla="*/ 4563274 w 4625868"/>
+                <a:gd name="connsiteY2" fmla="*/ 0 h 375557"/>
+                <a:gd name="connsiteX3" fmla="*/ 4625868 w 4625868"/>
+                <a:gd name="connsiteY3" fmla="*/ 62594 h 375557"/>
+                <a:gd name="connsiteX4" fmla="*/ 4625868 w 4625868"/>
+                <a:gd name="connsiteY4" fmla="*/ 312963 h 375557"/>
+                <a:gd name="connsiteX5" fmla="*/ 4563274 w 4625868"/>
+                <a:gd name="connsiteY5" fmla="*/ 375557 h 375557"/>
+                <a:gd name="connsiteX6" fmla="*/ 181777 w 4625868"/>
+                <a:gd name="connsiteY6" fmla="*/ 375557 h 375557"/>
+                <a:gd name="connsiteX7" fmla="*/ 126803 w 4625868"/>
+                <a:gd name="connsiteY7" fmla="*/ 240520 h 375557"/>
+                <a:gd name="connsiteX8" fmla="*/ 10319 w 4625868"/>
+                <a:gd name="connsiteY8" fmla="*/ 315726 h 375557"/>
+                <a:gd name="connsiteX9" fmla="*/ 0 w 4625868"/>
+                <a:gd name="connsiteY9" fmla="*/ 77770 h 375557"/>
+                <a:gd name="connsiteX10" fmla="*/ 119183 w 4625868"/>
+                <a:gd name="connsiteY10" fmla="*/ 127411 h 375557"/>
+              </a:gdLst>
+              <a:ahLst/>
+              <a:cxnLst>
+                <a:cxn ang="0">
+                  <a:pos x="connsiteX0" y="connsiteY0"/>
+                </a:cxn>
+                <a:cxn ang="0">
+                  <a:pos x="connsiteX1" y="connsiteY1"/>
+                </a:cxn>
+                <a:cxn ang="0">
+                  <a:pos x="connsiteX2" y="connsiteY2"/>
+                </a:cxn>
+                <a:cxn ang="0">
+                  <a:pos x="connsiteX3" y="connsiteY3"/>
+                </a:cxn>
+                <a:cxn ang="0">
+                  <a:pos x="connsiteX4" y="connsiteY4"/>
+                </a:cxn>
+                <a:cxn ang="0">
+                  <a:pos x="connsiteX5" y="connsiteY5"/>
+                </a:cxn>
+                <a:cxn ang="0">
+                  <a:pos x="connsiteX6" y="connsiteY6"/>
+                </a:cxn>
+                <a:cxn ang="0">
+                  <a:pos x="connsiteX7" y="connsiteY7"/>
+                </a:cxn>
+                <a:cxn ang="0">
+                  <a:pos x="connsiteX8" y="connsiteY8"/>
+                </a:cxn>
+                <a:cxn ang="0">
+                  <a:pos x="connsiteX9" y="connsiteY9"/>
+                </a:cxn>
+                <a:cxn ang="0">
+                  <a:pos x="connsiteX10" y="connsiteY10"/>
+                </a:cxn>
+              </a:cxnLst>
+              <a:rect l="l" t="t" r="r" b="b"/>
+              <a:pathLst>
+                <a:path w="4625868" h="375557">
+                  <a:moveTo>
+                    <a:pt x="119183" y="127411"/>
+                  </a:moveTo>
+                  <a:cubicBezTo>
+                    <a:pt x="119183" y="92841"/>
+                    <a:pt x="147207" y="0"/>
+                    <a:pt x="181777" y="0"/>
+                  </a:cubicBezTo>
+                  <a:lnTo>
+                    <a:pt x="4563274" y="0"/>
+                  </a:lnTo>
+                  <a:cubicBezTo>
+                    <a:pt x="4597844" y="0"/>
+                    <a:pt x="4625868" y="28024"/>
+                    <a:pt x="4625868" y="62594"/>
+                  </a:cubicBezTo>
+                  <a:lnTo>
+                    <a:pt x="4625868" y="312963"/>
+                  </a:lnTo>
+                  <a:cubicBezTo>
+                    <a:pt x="4625868" y="347533"/>
+                    <a:pt x="4597844" y="375557"/>
+                    <a:pt x="4563274" y="375557"/>
+                  </a:cubicBezTo>
+                  <a:lnTo>
+                    <a:pt x="181777" y="375557"/>
+                  </a:lnTo>
+                  <a:cubicBezTo>
+                    <a:pt x="147207" y="375557"/>
+                    <a:pt x="126803" y="275090"/>
+                    <a:pt x="126803" y="240520"/>
+                  </a:cubicBezTo>
+                  <a:lnTo>
+                    <a:pt x="10319" y="315726"/>
+                  </a:lnTo>
+                  <a:lnTo>
+                    <a:pt x="0" y="77770"/>
+                  </a:lnTo>
+                  <a:lnTo>
+                    <a:pt x="119183" y="127411"/>
+                  </a:lnTo>
+                  <a:close/>
+                </a:path>
+              </a:pathLst>
+            </a:custGeom>
+          </p:spPr>
+          <p:style>
+            <a:lnRef idx="2">
+              <a:schemeClr val="accent4">
+                <a:shade val="50000"/>
+              </a:schemeClr>
+            </a:lnRef>
+            <a:fillRef idx="1">
+              <a:schemeClr val="accent4"/>
+            </a:fillRef>
+            <a:effectRef idx="0">
+              <a:schemeClr val="accent4"/>
+            </a:effectRef>
+            <a:fontRef idx="minor">
+              <a:schemeClr val="lt1"/>
+            </a:fontRef>
+          </p:style>
+          <p:txBody>
+            <a:bodyPr rot="0" spcFirstLastPara="0" vert="horz" wrap="square" lIns="0" tIns="0" rIns="0" bIns="0" numCol="1" spcCol="0" rtlCol="0" fromWordArt="0" anchor="ctr" anchorCtr="0" forceAA="0" compatLnSpc="1">
+              <a:prstTxWarp prst="textNoShape">
+                <a:avLst/>
+              </a:prstTxWarp>
+              <a:noAutofit/>
+            </a:bodyPr>
+            <a:lstStyle/>
+            <a:p>
+              <a:pPr indent="63500">
+                <a:spcAft>
+                  <a:spcPts val="0"/>
+                </a:spcAft>
+              </a:pPr>
+              <a:r>
+                <a:rPr lang="zh-TW" altLang="en-US" sz="1200" kern="100" dirty="0">
+                  <a:cs typeface="Times New Roman" panose="02020603050405020304" pitchFamily="18" charset="0"/>
+                </a:rPr>
+                <a:t>按鍵</a:t>
+              </a:r>
+              <a:r>
+                <a:rPr lang="zh-TW" altLang="en-US" sz="1200" kern="100" dirty="0" smtClean="0">
+                  <a:cs typeface="Times New Roman" panose="02020603050405020304" pitchFamily="18" charset="0"/>
+                </a:rPr>
+                <a:t>值</a:t>
+              </a:r>
+              <a:r>
+                <a:rPr lang="en-US" altLang="zh-TW" sz="1200" kern="100" dirty="0" smtClean="0">
+                  <a:cs typeface="Times New Roman" panose="02020603050405020304" pitchFamily="18" charset="0"/>
+                </a:rPr>
+                <a:t>char</a:t>
+              </a:r>
+              <a:r>
+                <a:rPr lang="zh-TW" altLang="en-US" sz="1200" kern="100" dirty="0" smtClean="0">
+                  <a:cs typeface="Times New Roman" panose="02020603050405020304" pitchFamily="18" charset="0"/>
+                </a:rPr>
+                <a:t>轉換成數值</a:t>
+              </a:r>
+              <a:r>
+                <a:rPr lang="en-US" altLang="zh-TW" sz="1200" kern="100" dirty="0" err="1" smtClean="0">
+                  <a:cs typeface="Times New Roman" panose="02020603050405020304" pitchFamily="18" charset="0"/>
+                </a:rPr>
+                <a:t>int</a:t>
+              </a:r>
+              <a:endParaRPr lang="zh-TW" sz="1200" kern="100" dirty="0">
+                <a:effectLst/>
+                <a:ea typeface="新細明體" panose="02020500000000000000" pitchFamily="18" charset="-120"/>
+                <a:cs typeface="Times New Roman" panose="02020603050405020304" pitchFamily="18" charset="0"/>
+              </a:endParaRPr>
+            </a:p>
+          </p:txBody>
+        </p:sp>
+        <p:sp>
+          <p:nvSpPr>
+            <p:cNvPr id="89" name="手繪多邊形: 圖案 10"/>
+            <p:cNvSpPr/>
+            <p:nvPr/>
+          </p:nvSpPr>
+          <p:spPr>
+            <a:xfrm>
+              <a:off x="6911254" y="5337701"/>
+              <a:ext cx="396875" cy="180975"/>
+            </a:xfrm>
+            <a:custGeom>
+              <a:avLst/>
+              <a:gdLst>
+                <a:gd name="connsiteX0" fmla="*/ 84890 w 453390"/>
+                <a:gd name="connsiteY0" fmla="*/ 0 h 263525"/>
+                <a:gd name="connsiteX1" fmla="*/ 453390 w 453390"/>
+                <a:gd name="connsiteY1" fmla="*/ 0 h 263525"/>
+                <a:gd name="connsiteX2" fmla="*/ 453390 w 453390"/>
+                <a:gd name="connsiteY2" fmla="*/ 263525 h 263525"/>
+                <a:gd name="connsiteX3" fmla="*/ 84890 w 453390"/>
+                <a:gd name="connsiteY3" fmla="*/ 263525 h 263525"/>
+                <a:gd name="connsiteX4" fmla="*/ 59217 w 453390"/>
+                <a:gd name="connsiteY4" fmla="*/ 168771 h 263525"/>
+                <a:gd name="connsiteX5" fmla="*/ 4819 w 453390"/>
+                <a:gd name="connsiteY5" fmla="*/ 221542 h 263525"/>
+                <a:gd name="connsiteX6" fmla="*/ 0 w 453390"/>
+                <a:gd name="connsiteY6" fmla="*/ 54571 h 263525"/>
+                <a:gd name="connsiteX7" fmla="*/ 55658 w 453390"/>
+                <a:gd name="connsiteY7" fmla="*/ 89403 h 263525"/>
+                <a:gd name="connsiteX8" fmla="*/ 84890 w 453390"/>
+                <a:gd name="connsiteY8" fmla="*/ 0 h 263525"/>
+              </a:gdLst>
+              <a:ahLst/>
+              <a:cxnLst>
+                <a:cxn ang="0">
+                  <a:pos x="connsiteX0" y="connsiteY0"/>
+                </a:cxn>
+                <a:cxn ang="0">
+                  <a:pos x="connsiteX1" y="connsiteY1"/>
+                </a:cxn>
+                <a:cxn ang="0">
+                  <a:pos x="connsiteX2" y="connsiteY2"/>
+                </a:cxn>
+                <a:cxn ang="0">
+                  <a:pos x="connsiteX3" y="connsiteY3"/>
+                </a:cxn>
+                <a:cxn ang="0">
+                  <a:pos x="connsiteX4" y="connsiteY4"/>
+                </a:cxn>
+                <a:cxn ang="0">
+                  <a:pos x="connsiteX5" y="connsiteY5"/>
+                </a:cxn>
+                <a:cxn ang="0">
+                  <a:pos x="connsiteX6" y="connsiteY6"/>
+                </a:cxn>
+                <a:cxn ang="0">
+                  <a:pos x="connsiteX7" y="connsiteY7"/>
+                </a:cxn>
+                <a:cxn ang="0">
+                  <a:pos x="connsiteX8" y="connsiteY8"/>
+                </a:cxn>
+              </a:cxnLst>
+              <a:rect l="l" t="t" r="r" b="b"/>
+              <a:pathLst>
+                <a:path w="453390" h="263525">
+                  <a:moveTo>
+                    <a:pt x="84890" y="0"/>
+                  </a:moveTo>
+                  <a:lnTo>
+                    <a:pt x="453390" y="0"/>
+                  </a:lnTo>
+                  <a:lnTo>
+                    <a:pt x="453390" y="263525"/>
+                  </a:lnTo>
+                  <a:lnTo>
+                    <a:pt x="84890" y="263525"/>
+                  </a:lnTo>
+                  <a:cubicBezTo>
+                    <a:pt x="68745" y="263525"/>
+                    <a:pt x="59217" y="193028"/>
+                    <a:pt x="59217" y="168771"/>
+                  </a:cubicBezTo>
+                  <a:lnTo>
+                    <a:pt x="4819" y="221542"/>
+                  </a:lnTo>
+                  <a:lnTo>
+                    <a:pt x="0" y="54571"/>
+                  </a:lnTo>
+                  <a:lnTo>
+                    <a:pt x="55658" y="89403"/>
+                  </a:lnTo>
+                  <a:cubicBezTo>
+                    <a:pt x="55658" y="65146"/>
+                    <a:pt x="68745" y="0"/>
+                    <a:pt x="84890" y="0"/>
+                  </a:cubicBezTo>
+                  <a:close/>
+                </a:path>
+              </a:pathLst>
+            </a:custGeom>
+          </p:spPr>
+          <p:style>
+            <a:lnRef idx="2">
+              <a:schemeClr val="accent6">
+                <a:shade val="50000"/>
+              </a:schemeClr>
+            </a:lnRef>
+            <a:fillRef idx="1">
+              <a:schemeClr val="accent6"/>
+            </a:fillRef>
+            <a:effectRef idx="0">
+              <a:schemeClr val="accent6"/>
+            </a:effectRef>
+            <a:fontRef idx="minor">
+              <a:schemeClr val="lt1"/>
+            </a:fontRef>
+          </p:style>
+          <p:txBody>
+            <a:bodyPr rot="0" spcFirstLastPara="0" vert="horz" wrap="square" lIns="0" tIns="0" rIns="0" bIns="0" numCol="1" spcCol="0" rtlCol="0" fromWordArt="0" anchor="ctr" anchorCtr="0" forceAA="0" compatLnSpc="1">
+              <a:prstTxWarp prst="textNoShape">
+                <a:avLst/>
+              </a:prstTxWarp>
+              <a:noAutofit/>
+            </a:bodyPr>
+            <a:lstStyle/>
+            <a:p>
+              <a:pPr indent="73025">
+                <a:spcAft>
+                  <a:spcPts val="0"/>
+                </a:spcAft>
+              </a:pPr>
+              <a:r>
+                <a:rPr lang="en-US" sz="1200" kern="100" dirty="0" smtClean="0">
+                  <a:solidFill>
+                    <a:srgbClr val="FFFFFF"/>
+                  </a:solidFill>
+                  <a:ea typeface="新細明體" panose="02020500000000000000" pitchFamily="18" charset="-120"/>
+                  <a:cs typeface="Times New Roman" panose="02020603050405020304" pitchFamily="18" charset="0"/>
+                </a:rPr>
+                <a:t>‘</a:t>
+              </a:r>
+              <a:r>
+                <a:rPr lang="en-US" sz="1200" kern="100" dirty="0" smtClean="0">
+                  <a:solidFill>
+                    <a:srgbClr val="FFFFFF"/>
+                  </a:solidFill>
+                  <a:effectLst/>
+                  <a:ea typeface="新細明體" panose="02020500000000000000" pitchFamily="18" charset="-120"/>
+                  <a:cs typeface="Times New Roman" panose="02020603050405020304" pitchFamily="18" charset="0"/>
+                </a:rPr>
+                <a:t>     ‘</a:t>
+              </a:r>
+              <a:endParaRPr lang="zh-TW" sz="1200" kern="100" dirty="0">
+                <a:effectLst/>
+                <a:ea typeface="新細明體" panose="02020500000000000000" pitchFamily="18" charset="-120"/>
+                <a:cs typeface="Times New Roman" panose="02020603050405020304" pitchFamily="18" charset="0"/>
+              </a:endParaRPr>
+            </a:p>
+          </p:txBody>
+        </p:sp>
+      </p:grpSp>
     </p:spTree>
     <p:extLst>
       <p:ext uri="{BB962C8B-B14F-4D97-AF65-F5344CB8AC3E}">
